--- a/content/W03/SAT/slides/C2_W03_SAT_week_close_STUDENT.pptx
+++ b/content/W03/SAT/slides/C2_W03_SAT_week_close_STUDENT.pptx
@@ -697,7 +697,7 @@
           </a:p>
           <a:p>
             <a:r>
-              <a:t>rewrite, never an argument.</a:t>
+              <a:t>rewrite and move on.</a:t>
             </a:r>
           </a:p>
           <a:p>
@@ -12741,7 +12741,7 @@
         <p:spPr>
           <a:xfrm>
             <a:off x="530352" y="3474720"/>
-            <a:ext cx="11130991" cy="772160"/>
+            <a:ext cx="11130991" cy="1048512"/>
           </a:xfrm>
           <a:prstGeom prst="rect">
             <a:avLst/>
@@ -12766,7 +12766,7 @@
                 </a:solidFill>
                 <a:latin typeface="Calibri"/>
               </a:rPr>
-              <a:t>Each group's answer to Dr Menon is its own one-slide answer, said to the panel today; these fifteen minutes are about the method that produced it.</a:t>
+              <a:t>Kalpa Health is the US diagnostics business the week was built on; each group's answer to its COO, Dr Menon, is its own one-slide answer, said to the panel today, and these fifteen minutes are about the method behind it.</a:t>
             </a:r>
           </a:p>
         </p:txBody>

--- a/content/W03/SAT/slides/C2_W03_SAT_week_close_STUDENT.pptx
+++ b/content/W03/SAT/slides/C2_W03_SAT_week_close_STUDENT.pptx
@@ -517,12 +517,12 @@
           <a:lstStyle/>
           <a:p>
             <a:r>
-              <a:t>LIVE, 30 seconds, after grade closure; the last 15 minutes of the week. Four minutes on what the week</a:t>
-            </a:r>
-          </a:p>
-          <a:p>
-            <a:r>
-              <a:t>trained, eight on the nine improvements, three on Monday. Dr Menon asked which branch of her business</a:t>
+              <a:t>LIVE, 30 seconds with S1, after grade closure; the last 15 minutes of the week. Four minutes on what</a:t>
+            </a:r>
+          </a:p>
+          <a:p>
+            <a:r>
+              <a:t>the week trained, the cover and S1 included, eight on the nine improvements, three on Monday. Dr Menon asked which branch of her business</a:t>
             </a:r>
           </a:p>
           <a:p>
@@ -617,6 +617,11 @@
           </a:p>
           <a:p>
             <a:r>
+              <a:t>Watch for a sentence with no day in it; a change with no day is not planned.</a:t>
+            </a:r>
+          </a:p>
+          <a:p>
+            <a:r>
               <a:t>Transition: the sentence.</a:t>
             </a:r>
           </a:p>
@@ -937,7 +942,12 @@
           <a:lstStyle/>
           <a:p>
             <a:r>
-              <a:t>SELF-STUDY, 1 minute. Three questions, answered on the last two slides.</a:t>
+              <a:t>SELF-STUDY, 1 minute. Three questions, answered on the last two slides. Watch for a learner who</a:t>
+            </a:r>
+          </a:p>
+          <a:p>
+            <a:r>
+              <a:t>hears Monday as new material; it opens on the move this week used most.</a:t>
             </a:r>
           </a:p>
           <a:p>
@@ -1017,12 +1027,12 @@
           </a:p>
           <a:p>
             <a:r>
-              <a:t>marketing wants orders per month, operations wants app sessions, and the head of Retail-Plus wants</a:t>
-            </a:r>
-          </a:p>
-          <a:p>
-            <a:r>
-              <a:t>reorders per member. Stop there; Monday opens on it.</a:t>
+              <a:t>marketing wants orders per month, operations wants app sessions, and the head of Retail-Plus, Kalpa</a:t>
+            </a:r>
+          </a:p>
+          <a:p>
+            <a:r>
+              <a:t>Retail's paid membership tier, wants reorders per member. Stop there; Monday opens on it.</a:t>
             </a:r>
           </a:p>
           <a:p>
@@ -1177,12 +1187,12 @@
           <a:lstStyle/>
           <a:p>
             <a:r>
-              <a:t>LIVE, 30 seconds. Read the three questions. The middle one is the room's work and takes eight of the</a:t>
-            </a:r>
-          </a:p>
-          <a:p>
-            <a:r>
-              <a:t>fifteen minutes.</a:t>
+              <a:t>LIVE, inside the cover's 30 seconds. Read the three questions. The middle one is the room's work and</a:t>
+            </a:r>
+          </a:p>
+          <a:p>
+            <a:r>
+              <a:t>takes eight of the fifteen minutes.</a:t>
             </a:r>
           </a:p>
           <a:p>
@@ -1257,17 +1267,17 @@
           <a:lstStyle/>
           <a:p>
             <a:r>
-              <a:t>LIVE, 4 minutes over S3, S4 and S6; D2 and D5 are read alone. Nothing new was taught this week,</a:t>
-            </a:r>
-          </a:p>
-          <a:p>
-            <a:r>
-              <a:t>and that is the point to land: the method transferred, the vocabulary changed, and the cost of an</a:t>
-            </a:r>
-          </a:p>
-          <a:p>
-            <a:r>
-              <a:t>error rose.</a:t>
+              <a:t>LIVE, 3 minutes 30 seconds over S3, S4 and S6, after the cover's 30 seconds; D2 and D5 are read</a:t>
+            </a:r>
+          </a:p>
+          <a:p>
+            <a:r>
+              <a:t>alone. Nothing new was taught this week; the room used the moves of Weeks 1 and 2 on a business with</a:t>
+            </a:r>
+          </a:p>
+          <a:p>
+            <a:r>
+              <a:t>new words and costlier errors.</a:t>
             </a:r>
           </a:p>
           <a:p>
@@ -1342,7 +1352,12 @@
           <a:lstStyle/>
           <a:p>
             <a:r>
-              <a:t>SELF-STUDY, 1 minute. Four questions, answered in order.</a:t>
+              <a:t>SELF-STUDY, 1 minute. Four questions, answered in order. Watch for a learner who answers with the</a:t>
+            </a:r>
+          </a:p>
+          <a:p>
+            <a:r>
+              <a:t>tool they used; the interviewer is asking for the move and the number.</a:t>
             </a:r>
           </a:p>
           <a:p>
@@ -1507,12 +1522,12 @@
           <a:lstStyle/>
           <a:p>
             <a:r>
-              <a:t>LIVE, 1 minute. "The words changed and the cost of being wrong rose; the moves stayed, and that is the</a:t>
-            </a:r>
-          </a:p>
-          <a:p>
-            <a:r>
-              <a:t>week." These are Monday's two interview questions, asked again now that the room can answer them from</a:t>
+              <a:t>LIVE, 1 minute. "The words changed and the cost of being wrong rose, while the moves stayed the</a:t>
+            </a:r>
+          </a:p>
+          <a:p>
+            <a:r>
+              <a:t>same." These are Monday's two interview questions, asked again now that the room can answer them from</a:t>
             </a:r>
           </a:p>
           <a:p>
@@ -1602,7 +1617,7 @@
           </a:p>
           <a:p>
             <a:r>
-              <a:t>revenue-cycle management firm working for US providers. Kalpa's GCC is the first kind: one company's</a:t>
+              <a:t>revenue-cycle management firm whose clients include large US hospitals and health systems. Kalpa's GCC is the first kind: one company's</a:t>
             </a:r>
           </a:p>
           <a:p>
@@ -1697,7 +1712,7 @@
           </a:p>
           <a:p>
             <a:r>
-              <a:t>because each answer is now a true story with a number in it.</a:t>
+              <a:t>since each answer is now a true story with a number in it.</a:t>
             </a:r>
           </a:p>
           <a:p>
@@ -5035,7 +5050,7 @@
                 </a:solidFill>
                 <a:latin typeface="Georgia"/>
               </a:rPr>
-              <a:t>What did Build 1 prove, and what changes first in Build 2?</a:t>
+              <a:t>What did Build 1 train, and what changes first in Build 2?</a:t>
             </a:r>
           </a:p>
         </p:txBody>
@@ -5350,7 +5365,7 @@
                 </a:solidFill>
                 <a:latin typeface="Calibri"/>
               </a:rPr>
-              <a:t>What did Build 1 prove, and what changes first in Build 2?</a:t>
+              <a:t>What did Build 1 train, and what changes first in Build 2?</a:t>
             </a:r>
           </a:p>
         </p:txBody>
@@ -5591,7 +5606,7 @@
                 </a:solidFill>
                 <a:latin typeface="Georgia"/>
               </a:rPr>
-              <a:t>Nine sentences become Build 2's first-day sheet</a:t>
+              <a:t>Build 2's first day needs one change per group</a:t>
             </a:r>
           </a:p>
         </p:txBody>
@@ -5695,7 +5710,7 @@
         <p:spPr>
           <a:xfrm>
             <a:off x="530352" y="1956816"/>
-            <a:ext cx="11130991" cy="807720"/>
+            <a:ext cx="11130991" cy="1074420"/>
           </a:xfrm>
           <a:prstGeom prst="roundRect">
             <a:avLst>
@@ -5743,7 +5758,7 @@
         <p:spPr>
           <a:xfrm>
             <a:off x="676656" y="2084832"/>
-            <a:ext cx="45720" cy="551688"/>
+            <a:ext cx="45720" cy="818388"/>
           </a:xfrm>
           <a:prstGeom prst="roundRect">
             <a:avLst>
@@ -5789,7 +5804,7 @@
         <p:spPr>
           <a:xfrm>
             <a:off x="877824" y="2075688"/>
-            <a:ext cx="10564063" cy="624840"/>
+            <a:ext cx="10564063" cy="891540"/>
           </a:xfrm>
           <a:prstGeom prst="rect">
             <a:avLst/>
@@ -5818,7 +5833,7 @@
                 </a:solidFill>
                 <a:latin typeface="Calibri"/>
               </a:rPr>
-              <a:t>Each group, on Tuesday 10 November, when Build 2 opens in Kalpa Financial Services; a change named as a feeling gives that first day nothing to do differently.</a:t>
+              <a:t>Each group, on Tuesday 10 November, when Build 2 opens in Kalpa Financial Services, the Kalpa business whose lending question arrives in Week 5; a change named as a feeling gives that first day nothing to do differently.</a:t>
             </a:r>
           </a:p>
         </p:txBody>
@@ -5831,7 +5846,7 @@
         </p:nvSpPr>
         <p:spPr>
           <a:xfrm>
-            <a:off x="1853145" y="3496056"/>
+            <a:off x="1853145" y="3762756"/>
             <a:ext cx="8485403" cy="18288"/>
           </a:xfrm>
           <a:prstGeom prst="rect">
@@ -5875,7 +5890,7 @@
         </p:nvSpPr>
         <p:spPr>
           <a:xfrm>
-            <a:off x="530352" y="2929128"/>
+            <a:off x="530352" y="3195828"/>
             <a:ext cx="2645587" cy="168656"/>
           </a:xfrm>
           <a:prstGeom prst="rect">
@@ -5910,7 +5925,7 @@
         </p:nvSpPr>
         <p:spPr>
           <a:xfrm>
-            <a:off x="1752561" y="3404616"/>
+            <a:off x="1752561" y="3671316"/>
             <a:ext cx="201168" cy="201168"/>
           </a:xfrm>
           <a:prstGeom prst="ellipse">
@@ -5954,7 +5969,7 @@
         </p:nvSpPr>
         <p:spPr>
           <a:xfrm>
-            <a:off x="530352" y="3816096"/>
+            <a:off x="530352" y="4082796"/>
             <a:ext cx="2645587" cy="1076960"/>
           </a:xfrm>
           <a:prstGeom prst="roundRect">
@@ -6008,7 +6023,7 @@
         </p:nvSpPr>
         <p:spPr>
           <a:xfrm>
-            <a:off x="694944" y="3962400"/>
+            <a:off x="694944" y="4229100"/>
             <a:ext cx="2316403" cy="251205"/>
           </a:xfrm>
           <a:prstGeom prst="rect">
@@ -6043,7 +6058,7 @@
         </p:nvSpPr>
         <p:spPr>
           <a:xfrm>
-            <a:off x="694944" y="4250182"/>
+            <a:off x="694944" y="4516882"/>
             <a:ext cx="2316403" cy="366776"/>
           </a:xfrm>
           <a:prstGeom prst="rect">
@@ -6078,7 +6093,7 @@
         </p:nvSpPr>
         <p:spPr>
           <a:xfrm>
-            <a:off x="3358819" y="2929128"/>
+            <a:off x="3358819" y="3195828"/>
             <a:ext cx="2645587" cy="168656"/>
           </a:xfrm>
           <a:prstGeom prst="rect">
@@ -6113,7 +6128,7 @@
         </p:nvSpPr>
         <p:spPr>
           <a:xfrm>
-            <a:off x="4581029" y="3404616"/>
+            <a:off x="4581029" y="3671316"/>
             <a:ext cx="201168" cy="201168"/>
           </a:xfrm>
           <a:prstGeom prst="ellipse">
@@ -6157,7 +6172,7 @@
         </p:nvSpPr>
         <p:spPr>
           <a:xfrm>
-            <a:off x="3358819" y="3816096"/>
+            <a:off x="3358819" y="4082796"/>
             <a:ext cx="2645587" cy="1076960"/>
           </a:xfrm>
           <a:prstGeom prst="roundRect">
@@ -6211,7 +6226,7 @@
         </p:nvSpPr>
         <p:spPr>
           <a:xfrm>
-            <a:off x="3523411" y="3962400"/>
+            <a:off x="3523411" y="4229100"/>
             <a:ext cx="2316403" cy="251205"/>
           </a:xfrm>
           <a:prstGeom prst="rect">
@@ -6246,7 +6261,7 @@
         </p:nvSpPr>
         <p:spPr>
           <a:xfrm>
-            <a:off x="3523411" y="4250182"/>
+            <a:off x="3523411" y="4516882"/>
             <a:ext cx="2316403" cy="366776"/>
           </a:xfrm>
           <a:prstGeom prst="rect">
@@ -6281,7 +6296,7 @@
         </p:nvSpPr>
         <p:spPr>
           <a:xfrm>
-            <a:off x="6187287" y="2929128"/>
+            <a:off x="6187287" y="3195828"/>
             <a:ext cx="2645587" cy="168656"/>
           </a:xfrm>
           <a:prstGeom prst="rect">
@@ -6316,7 +6331,7 @@
         </p:nvSpPr>
         <p:spPr>
           <a:xfrm>
-            <a:off x="7409497" y="3404616"/>
+            <a:off x="7409497" y="3671316"/>
             <a:ext cx="201168" cy="201168"/>
           </a:xfrm>
           <a:prstGeom prst="ellipse">
@@ -6360,7 +6375,7 @@
         </p:nvSpPr>
         <p:spPr>
           <a:xfrm>
-            <a:off x="6187287" y="3816096"/>
+            <a:off x="6187287" y="4082796"/>
             <a:ext cx="2645587" cy="1076960"/>
           </a:xfrm>
           <a:prstGeom prst="roundRect">
@@ -6414,7 +6429,7 @@
         </p:nvSpPr>
         <p:spPr>
           <a:xfrm>
-            <a:off x="6351879" y="3962400"/>
+            <a:off x="6351879" y="4229100"/>
             <a:ext cx="2316403" cy="251205"/>
           </a:xfrm>
           <a:prstGeom prst="rect">
@@ -6449,7 +6464,7 @@
         </p:nvSpPr>
         <p:spPr>
           <a:xfrm>
-            <a:off x="6351879" y="4250182"/>
+            <a:off x="6351879" y="4516882"/>
             <a:ext cx="2316403" cy="366776"/>
           </a:xfrm>
           <a:prstGeom prst="rect">
@@ -6484,7 +6499,7 @@
         </p:nvSpPr>
         <p:spPr>
           <a:xfrm>
-            <a:off x="9015755" y="2929128"/>
+            <a:off x="9015755" y="3195828"/>
             <a:ext cx="2645587" cy="168656"/>
           </a:xfrm>
           <a:prstGeom prst="rect">
@@ -6519,7 +6534,7 @@
         </p:nvSpPr>
         <p:spPr>
           <a:xfrm>
-            <a:off x="10237965" y="3404616"/>
+            <a:off x="10237965" y="3671316"/>
             <a:ext cx="201168" cy="201168"/>
           </a:xfrm>
           <a:prstGeom prst="ellipse">
@@ -6563,7 +6578,7 @@
         </p:nvSpPr>
         <p:spPr>
           <a:xfrm>
-            <a:off x="9015755" y="3816096"/>
+            <a:off x="9015755" y="4082796"/>
             <a:ext cx="2645587" cy="1076960"/>
           </a:xfrm>
           <a:prstGeom prst="roundRect">
@@ -6623,7 +6638,7 @@
         </p:nvSpPr>
         <p:spPr>
           <a:xfrm>
-            <a:off x="9180347" y="3962400"/>
+            <a:off x="9180347" y="4229100"/>
             <a:ext cx="2316403" cy="251205"/>
           </a:xfrm>
           <a:prstGeom prst="rect">
@@ -6658,7 +6673,7 @@
         </p:nvSpPr>
         <p:spPr>
           <a:xfrm>
-            <a:off x="9180347" y="4250182"/>
+            <a:off x="9180347" y="4516882"/>
             <a:ext cx="2316403" cy="366776"/>
           </a:xfrm>
           <a:prstGeom prst="rect">
@@ -7158,7 +7173,7 @@
                 </a:solidFill>
                 <a:latin typeface="Georgia"/>
               </a:rPr>
-              <a:t>One improvement, one sentence, two minutes</a:t>
+              <a:t>Each group turns its costliest entry into one sentence</a:t>
             </a:r>
           </a:p>
         </p:txBody>
@@ -8966,7 +8981,7 @@
                 </a:solidFill>
                 <a:latin typeface="Calibri"/>
               </a:rPr>
-              <a:t>Week 3 Saturday: what did Build 1 prove, and what changes first in Build 2?</a:t>
+              <a:t>Week 3 Saturday: what did Build 1 train, and what changes first in Build 2?</a:t>
             </a:r>
           </a:p>
         </p:txBody>
@@ -9311,7 +9326,7 @@
         <p:spPr>
           <a:xfrm>
             <a:off x="530352" y="1956816"/>
-            <a:ext cx="11130991" cy="807720"/>
+            <a:ext cx="11130991" cy="1074420"/>
           </a:xfrm>
           <a:prstGeom prst="roundRect">
             <a:avLst>
@@ -9359,7 +9374,7 @@
         <p:spPr>
           <a:xfrm>
             <a:off x="676656" y="2084832"/>
-            <a:ext cx="45720" cy="551688"/>
+            <a:ext cx="45720" cy="818388"/>
           </a:xfrm>
           <a:prstGeom prst="roundRect">
             <a:avLst>
@@ -9405,7 +9420,7 @@
         <p:spPr>
           <a:xfrm>
             <a:off x="877824" y="2075688"/>
-            <a:ext cx="10564063" cy="624840"/>
+            <a:ext cx="10564063" cy="891540"/>
           </a:xfrm>
           <a:prstGeom prst="rect">
             <a:avLst/>
@@ -9434,7 +9449,7 @@
                 </a:solidFill>
                 <a:latin typeface="Calibri"/>
               </a:rPr>
-              <a:t>Meera Raghavan, CEO of Kalpa Retail, who is building a growth plan on frequency and wants one number the whole company chases, with the numbers that stop anyone gaming it.</a:t>
+              <a:t>Meera Raghavan, CEO of Kalpa Retail, who is building a growth plan on frequency and wants one number the whole company chases, with the numbers that stop anyone gaming it; a target chosen badly moves while the business stands still.</a:t>
             </a:r>
           </a:p>
         </p:txBody>
@@ -9447,7 +9462,7 @@
         </p:nvSpPr>
         <p:spPr>
           <a:xfrm>
-            <a:off x="2324557" y="3496056"/>
+            <a:off x="2324557" y="3762756"/>
             <a:ext cx="7542580" cy="18288"/>
           </a:xfrm>
           <a:prstGeom prst="rect">
@@ -9491,7 +9506,7 @@
         </p:nvSpPr>
         <p:spPr>
           <a:xfrm>
-            <a:off x="530352" y="2929128"/>
+            <a:off x="530352" y="3195828"/>
             <a:ext cx="3588410" cy="168656"/>
           </a:xfrm>
           <a:prstGeom prst="rect">
@@ -9526,7 +9541,7 @@
         </p:nvSpPr>
         <p:spPr>
           <a:xfrm>
-            <a:off x="2223973" y="3404616"/>
+            <a:off x="2223973" y="3671316"/>
             <a:ext cx="201168" cy="201168"/>
           </a:xfrm>
           <a:prstGeom prst="ellipse">
@@ -9570,7 +9585,7 @@
         </p:nvSpPr>
         <p:spPr>
           <a:xfrm>
-            <a:off x="530352" y="3816096"/>
+            <a:off x="530352" y="4082796"/>
             <a:ext cx="3588410" cy="1076960"/>
           </a:xfrm>
           <a:prstGeom prst="roundRect">
@@ -9624,7 +9639,7 @@
         </p:nvSpPr>
         <p:spPr>
           <a:xfrm>
-            <a:off x="694944" y="3962400"/>
+            <a:off x="694944" y="4229100"/>
             <a:ext cx="3259226" cy="251205"/>
           </a:xfrm>
           <a:prstGeom prst="rect">
@@ -9659,7 +9674,7 @@
         </p:nvSpPr>
         <p:spPr>
           <a:xfrm>
-            <a:off x="694944" y="4250182"/>
+            <a:off x="694944" y="4516882"/>
             <a:ext cx="3259226" cy="201676"/>
           </a:xfrm>
           <a:prstGeom prst="rect">
@@ -9694,7 +9709,7 @@
         </p:nvSpPr>
         <p:spPr>
           <a:xfrm>
-            <a:off x="4301642" y="2929128"/>
+            <a:off x="4301642" y="3195828"/>
             <a:ext cx="3588410" cy="168656"/>
           </a:xfrm>
           <a:prstGeom prst="rect">
@@ -9729,7 +9744,7 @@
         </p:nvSpPr>
         <p:spPr>
           <a:xfrm>
-            <a:off x="5995263" y="3404616"/>
+            <a:off x="5995263" y="3671316"/>
             <a:ext cx="201168" cy="201168"/>
           </a:xfrm>
           <a:prstGeom prst="ellipse">
@@ -9773,7 +9788,7 @@
         </p:nvSpPr>
         <p:spPr>
           <a:xfrm>
-            <a:off x="4301642" y="3816096"/>
+            <a:off x="4301642" y="4082796"/>
             <a:ext cx="3588410" cy="1076960"/>
           </a:xfrm>
           <a:prstGeom prst="roundRect">
@@ -9827,7 +9842,7 @@
         </p:nvSpPr>
         <p:spPr>
           <a:xfrm>
-            <a:off x="4466234" y="3962400"/>
+            <a:off x="4466234" y="4229100"/>
             <a:ext cx="3259226" cy="251205"/>
           </a:xfrm>
           <a:prstGeom prst="rect">
@@ -9862,7 +9877,7 @@
         </p:nvSpPr>
         <p:spPr>
           <a:xfrm>
-            <a:off x="4466234" y="4250182"/>
+            <a:off x="4466234" y="4516882"/>
             <a:ext cx="3259226" cy="366776"/>
           </a:xfrm>
           <a:prstGeom prst="rect">
@@ -9897,7 +9912,7 @@
         </p:nvSpPr>
         <p:spPr>
           <a:xfrm>
-            <a:off x="8072932" y="2929128"/>
+            <a:off x="8072932" y="3195828"/>
             <a:ext cx="3588410" cy="168656"/>
           </a:xfrm>
           <a:prstGeom prst="rect">
@@ -9932,7 +9947,7 @@
         </p:nvSpPr>
         <p:spPr>
           <a:xfrm>
-            <a:off x="9766554" y="3404616"/>
+            <a:off x="9766554" y="3671316"/>
             <a:ext cx="201168" cy="201168"/>
           </a:xfrm>
           <a:prstGeom prst="ellipse">
@@ -9976,7 +9991,7 @@
         </p:nvSpPr>
         <p:spPr>
           <a:xfrm>
-            <a:off x="8072932" y="3816096"/>
+            <a:off x="8072932" y="4082796"/>
             <a:ext cx="3588410" cy="1076960"/>
           </a:xfrm>
           <a:prstGeom prst="roundRect">
@@ -10036,7 +10051,7 @@
         </p:nvSpPr>
         <p:spPr>
           <a:xfrm>
-            <a:off x="8237524" y="3962400"/>
+            <a:off x="8237524" y="4229100"/>
             <a:ext cx="3259226" cy="251205"/>
           </a:xfrm>
           <a:prstGeom prst="rect">
@@ -10071,7 +10086,7 @@
         </p:nvSpPr>
         <p:spPr>
           <a:xfrm>
-            <a:off x="8237524" y="4250182"/>
+            <a:off x="8237524" y="4516882"/>
             <a:ext cx="3259226" cy="201676"/>
           </a:xfrm>
           <a:prstGeom prst="rect">
@@ -10571,7 +10586,7 @@
                 </a:solidFill>
                 <a:latin typeface="Georgia"/>
               </a:rPr>
-              <a:t>Monday opens back in Kalpa Retail, on Meera's number</a:t>
+              <a:t>Meera asks for one number; ask first what it counts</a:t>
             </a:r>
           </a:p>
         </p:txBody>
@@ -11305,7 +11320,7 @@
                 </a:solidFill>
                 <a:latin typeface="Georgia"/>
               </a:rPr>
-              <a:t>The week in three lines, and Monday left open</a:t>
+              <a:t>Count first, name the denominator, hold the caveat</a:t>
             </a:r>
           </a:p>
         </p:txBody>
@@ -12703,7 +12718,7 @@
                 </a:solidFill>
                 <a:latin typeface="Calibri"/>
               </a:rPr>
-              <a:t>What did Build 1 prove, and what does each group change first in Build 2?</a:t>
+              <a:t>What did Build 1 train, and what does each group change first in Build 2?</a:t>
             </a:r>
           </a:p>
         </p:txBody>
@@ -12766,7 +12781,7 @@
                 </a:solidFill>
                 <a:latin typeface="Calibri"/>
               </a:rPr>
-              <a:t>Kalpa Health is the US diagnostics business the week was built on; each group's answer to its COO, Dr Menon, is its own one-slide answer, said to the panel today, and these fifteen minutes are about the method behind it.</a:t>
+              <a:t>Kalpa Health is the US diagnostics business the week was built on; each group's answer to its COO, Dr Menon, is its one-slide answer (claim, evidence, caveat and action), said today to a panel of an industry expert or a senior industry leader, and these fifteen minutes are about the method behind it.</a:t>
             </a:r>
           </a:p>
         </p:txBody>
@@ -13514,7 +13529,7 @@
                 </a:solidFill>
                 <a:latin typeface="Calibri"/>
               </a:rPr>
-              <a:t>Week 3 Saturday: what did Build 1 prove, and what changes first in Build 2?</a:t>
+              <a:t>Week 3 Saturday: what did Build 1 train, and what changes first in Build 2?</a:t>
             </a:r>
           </a:p>
         </p:txBody>
@@ -13755,7 +13770,7 @@
                 </a:solidFill>
                 <a:latin typeface="Georgia"/>
               </a:rPr>
-              <a:t>The same moves answered a business nobody had seen</a:t>
+              <a:t>Every learner will be asked how they handled new data</a:t>
             </a:r>
           </a:p>
         </p:txBody>
@@ -13982,7 +13997,7 @@
                 </a:solidFill>
                 <a:latin typeface="Calibri"/>
               </a:rPr>
-              <a:t>Every learner, who will be asked in an interview how they handled data from a business they did not know, and whose honest answer is now a story from this week with a number in it.</a:t>
+              <a:t>Every learner, who will be asked in an interview how they handled data from a business they did not know; an answer with no number and no decision in it sounds like a guess.</a:t>
             </a:r>
           </a:p>
         </p:txBody>
@@ -16294,7 +16309,7 @@
                 </a:solidFill>
                 <a:latin typeface="Georgia"/>
               </a:rPr>
-              <a:t>A new domain changed the words and the cost of error</a:t>
+              <a:t>New words and costlier errors, with the same moves</a:t>
             </a:r>
           </a:p>
         </p:txBody>
@@ -16778,7 +16793,7 @@
         <p:spPr>
           <a:xfrm>
             <a:off x="530352" y="4431792"/>
-            <a:ext cx="11130991" cy="1121664"/>
+            <a:ext cx="11130991" cy="1380744"/>
           </a:xfrm>
           <a:prstGeom prst="roundRect">
             <a:avLst>
@@ -16831,7 +16846,7 @@
         </p:nvSpPr>
         <p:spPr>
           <a:xfrm>
-            <a:off x="758952" y="4764024"/>
+            <a:off x="758952" y="4893564"/>
             <a:ext cx="457200" cy="457200"/>
           </a:xfrm>
           <a:prstGeom prst="ellipse">
@@ -16883,7 +16898,7 @@
         </p:blipFill>
         <p:spPr>
           <a:xfrm>
-            <a:off x="868680" y="4873752"/>
+            <a:off x="868680" y="5003292"/>
             <a:ext cx="237744" cy="237744"/>
           </a:xfrm>
           <a:prstGeom prst="rect">
@@ -16935,7 +16950,7 @@
         <p:spPr>
           <a:xfrm>
             <a:off x="1399031" y="4797552"/>
-            <a:ext cx="9987991" cy="682752"/>
+            <a:ext cx="9987991" cy="941832"/>
           </a:xfrm>
           <a:prstGeom prst="rect">
             <a:avLst/>
@@ -16955,7 +16970,7 @@
                 </a:solidFill>
                 <a:latin typeface="Calibri"/>
               </a:rPr>
-              <a:t>[S] You have joined a healthcare company; how would you apply what you did in retail to our data? [F] What changes when the cost of an error is a missed diagnosis rather than a missed sale?</a:t>
+              <a:t>[S] You have joined a healthcare company; how would you apply what you did in retail to our data? [F] What changes when the cost of an error is a missed diagnosis rather than a missed sale? ([S] marks a staple asked everywhere, [F] a question frequent in GCC and product screens.)</a:t>
             </a:r>
           </a:p>
         </p:txBody>
@@ -18224,7 +18239,7 @@
         <p:spPr>
           <a:xfrm>
             <a:off x="530352" y="4294124"/>
-            <a:ext cx="11130991" cy="772160"/>
+            <a:ext cx="11130991" cy="1048512"/>
           </a:xfrm>
           <a:prstGeom prst="rect">
             <a:avLst/>
@@ -18249,7 +18264,7 @@
                 </a:solidFill>
                 <a:latin typeface="Calibri"/>
               </a:rPr>
-              <a:t>Claims, postings and denials read from Bengaluru for a US laboratory are the daily work of both kinds of team (UnitedHealth Group careers, India; agshealth.com; both read on 1 October 2026).</a:t>
+              <a:t>Optum India runs healthcare operations, technology and analytics for UnitedHealth Group, and AGS Health does billing and coding for large US hospitals and health systems, both from Indian cities (UnitedHealth Group careers, India; agshealth.com; both read on 1 October 2026).</a:t>
             </a:r>
           </a:p>
         </p:txBody>
@@ -19895,7 +19910,7 @@
                 </a:solidFill>
                 <a:latin typeface="Calibri"/>
               </a:rPr>
-              <a:t>What one change does each group make on day one of Build 2, and which entry in its challenges log earns it?</a:t>
+              <a:t>What one change does each group make on day one of Build 2, and which entry in its challenges log, the dated record of where it got stuck, earns it?</a:t>
             </a:r>
           </a:p>
         </p:txBody>
@@ -20095,7 +20110,7 @@
                 </a:solidFill>
                 <a:latin typeface="Calibri"/>
               </a:rPr>
-              <a:t>Week 3 Saturday: what did Build 1 prove, and what changes first in Build 2?</a:t>
+              <a:t>Week 3 Saturday: what did Build 1 train, and what changes first in Build 2?</a:t>
             </a:r>
           </a:p>
         </p:txBody>
